--- a/Pasos-Presentacion-ES.pptx
+++ b/Pasos-Presentacion-ES.pptx
@@ -1932,14 +1932,53 @@
         </p:blipFill>
         <p:spPr>
           <a:xfrm>
-            <a:off x="9784080" y="3822192"/>
-            <a:ext cx="960120" cy="978408"/>
+            <a:off x="9464040" y="3520440"/>
+            <a:ext cx="1325880" cy="1298448"/>
           </a:xfrm>
           <a:prstGeom prst="rect">
             <a:avLst/>
           </a:prstGeom>
         </p:spPr>
       </p:pic>
+      <p:sp>
+        <p:nvSpPr>
+          <p:cNvPr id="10" name="Text 6"/>
+          <p:cNvSpPr/>
+          <p:nvPr/>
+        </p:nvSpPr>
+        <p:spPr>
+          <a:xfrm>
+            <a:off x="9144000" y="4864608"/>
+            <a:ext cx="1920240" cy="228600"/>
+          </a:xfrm>
+          <a:prstGeom prst="rect">
+            <a:avLst/>
+          </a:prstGeom>
+          <a:noFill/>
+          <a:ln/>
+        </p:spPr>
+        <p:txBody>
+          <a:bodyPr wrap="square" lIns="0" tIns="0" rIns="0" bIns="0" rtlCol="0" anchor="ctr"/>
+          <a:lstStyle/>
+          <a:p>
+            <a:pPr algn="ctr" indent="0" marL="0">
+              <a:buNone/>
+            </a:pPr>
+            <a:r>
+              <a:rPr lang="en-US" sz="1000" b="1" spc="200" kern="0" dirty="0">
+                <a:solidFill>
+                  <a:srgbClr val="10C896"/>
+                </a:solidFill>
+                <a:latin typeface="Helvetica Neue" pitchFamily="34" charset="0"/>
+                <a:ea typeface="Helvetica Neue" pitchFamily="34" charset="-122"/>
+                <a:cs typeface="Helvetica Neue" pitchFamily="34" charset="-120"/>
+              </a:rPr>
+              <a:t>tu avatar</a:t>
+            </a:r>
+            <a:endParaRPr lang="en-US" sz="1000" dirty="0"/>
+          </a:p>
+        </p:txBody>
+      </p:sp>
     </p:spTree>
   </p:cSld>
   <p:clrMapOvr>
@@ -5537,9 +5576,43 @@
           </a:p>
         </p:txBody>
       </p:sp>
+      <p:sp>
+        <p:nvSpPr>
+          <p:cNvPr id="40" name="Shape 38"/>
+          <p:cNvSpPr/>
+          <p:nvPr/>
+        </p:nvSpPr>
+        <p:spPr>
+          <a:xfrm>
+            <a:off x="7635240" y="1691640"/>
+            <a:ext cx="4023360" cy="4160520"/>
+          </a:xfrm>
+          <a:prstGeom prst="roundRect">
+            <a:avLst>
+              <a:gd name="adj" fmla="val 2045"/>
+            </a:avLst>
+          </a:prstGeom>
+          <a:solidFill>
+            <a:srgbClr val="FBFAF6"/>
+          </a:solidFill>
+          <a:ln w="12700">
+            <a:solidFill>
+              <a:srgbClr val="E3E8E5"/>
+            </a:solidFill>
+            <a:prstDash val="solid"/>
+          </a:ln>
+          <a:effectLst>
+            <a:outerShdw sx="100000" sy="100000" kx="0" ky="0" algn="bl" rotWithShape="0" blurRad="114300" dist="38100" dir="8100000">
+              <a:srgbClr val="1A1614">
+                <a:alpha val="12000"/>
+              </a:srgbClr>
+            </a:outerShdw>
+          </a:effectLst>
+        </p:spPr>
+      </p:sp>
       <p:pic>
         <p:nvPicPr>
-          <p:cNvPr id="40" name="Image 0" descr="_reference/panorama/inca-master-profile.png">    </p:cNvPr>
+          <p:cNvPr id="41" name="Image 0" descr="ui-icons/alpaca-static.png">    </p:cNvPr>
           <p:cNvPicPr>
             <a:picLocks noChangeAspect="1"/>
           </p:cNvPicPr>
@@ -5547,14 +5620,13 @@
         </p:nvPicPr>
         <p:blipFill>
           <a:blip r:embed="rId1"/>
-          <a:stretch>
-            <a:fillRect/>
-          </a:stretch>
+          <a:srcRect l="0" r="0" t="0" b="0"/>
+          <a:stretch/>
         </p:blipFill>
         <p:spPr>
           <a:xfrm>
-            <a:off x="7635240" y="2331720"/>
-            <a:ext cx="4023360" cy="1051560"/>
+            <a:off x="8732520" y="2011680"/>
+            <a:ext cx="1828800" cy="1828800"/>
           </a:xfrm>
           <a:prstGeom prst="rect">
             <a:avLst/>
@@ -5563,41 +5635,80 @@
       </p:pic>
       <p:sp>
         <p:nvSpPr>
-          <p:cNvPr id="41" name="Text 38"/>
-          <p:cNvSpPr/>
-          <p:nvPr/>
-        </p:nvSpPr>
-        <p:spPr>
-          <a:xfrm>
-            <a:off x="7635240" y="3520440"/>
-            <a:ext cx="4023360" cy="914400"/>
-          </a:xfrm>
-          <a:prstGeom prst="rect">
-            <a:avLst/>
-          </a:prstGeom>
-          <a:noFill/>
-          <a:ln/>
-        </p:spPr>
-        <p:txBody>
-          <a:bodyPr wrap="square" lIns="0" tIns="0" rIns="0" bIns="0" rtlCol="0" anchor="ctr"/>
-          <a:lstStyle/>
-          <a:p>
-            <a:pPr indent="0" marL="0">
-              <a:lnSpc>
-                <a:spcPct val="115000"/>
-              </a:lnSpc>
-              <a:buNone/>
-            </a:pPr>
-            <a:r>
-              <a:rPr lang="en-US" sz="1250" i="1" dirty="0">
-                <a:solidFill>
-                  <a:srgbClr val="6B645C"/>
+          <p:cNvPr id="42" name="Text 39"/>
+          <p:cNvSpPr/>
+          <p:nvPr/>
+        </p:nvSpPr>
+        <p:spPr>
+          <a:xfrm>
+            <a:off x="7818120" y="3886200"/>
+            <a:ext cx="3657600" cy="411480"/>
+          </a:xfrm>
+          <a:prstGeom prst="rect">
+            <a:avLst/>
+          </a:prstGeom>
+          <a:noFill/>
+          <a:ln/>
+        </p:spPr>
+        <p:txBody>
+          <a:bodyPr wrap="square" lIns="0" tIns="0" rIns="0" bIns="0" rtlCol="0" anchor="ctr"/>
+          <a:lstStyle/>
+          <a:p>
+            <a:pPr algn="ctr" indent="0" marL="0">
+              <a:buNone/>
+            </a:pPr>
+            <a:r>
+              <a:rPr lang="en-US" sz="1600" b="1" dirty="0">
+                <a:solidFill>
+                  <a:srgbClr val="1A1614"/>
                 </a:solidFill>
                 <a:latin typeface="Georgia" pitchFamily="34" charset="0"/>
                 <a:ea typeface="Georgia" pitchFamily="34" charset="-122"/>
                 <a:cs typeface="Georgia" pitchFamily="34" charset="-120"/>
               </a:rPr>
-              <a:t>Cada ruta re-tematiza toda la app — colores, mapas y el avatar cambian según el lugar.</a:t>
+              <a:t>Tu avatar: un animal de la zona</a:t>
+            </a:r>
+            <a:endParaRPr lang="en-US" sz="1600" dirty="0"/>
+          </a:p>
+        </p:txBody>
+      </p:sp>
+      <p:sp>
+        <p:nvSpPr>
+          <p:cNvPr id="43" name="Text 40"/>
+          <p:cNvSpPr/>
+          <p:nvPr/>
+        </p:nvSpPr>
+        <p:spPr>
+          <a:xfrm>
+            <a:off x="7863840" y="4389120"/>
+            <a:ext cx="3566160" cy="1371600"/>
+          </a:xfrm>
+          <a:prstGeom prst="rect">
+            <a:avLst/>
+          </a:prstGeom>
+          <a:noFill/>
+          <a:ln/>
+        </p:spPr>
+        <p:txBody>
+          <a:bodyPr wrap="square" lIns="0" tIns="0" rIns="0" bIns="0" rtlCol="0" anchor="ctr"/>
+          <a:lstStyle/>
+          <a:p>
+            <a:pPr algn="ctr" indent="0" marL="0">
+              <a:lnSpc>
+                <a:spcPct val="120000"/>
+              </a:lnSpc>
+              <a:buNone/>
+            </a:pPr>
+            <a:r>
+              <a:rPr lang="en-US" sz="1250" dirty="0">
+                <a:solidFill>
+                  <a:srgbClr val="6B645C"/>
+                </a:solidFill>
+                <a:latin typeface="Helvetica Neue" pitchFamily="34" charset="0"/>
+                <a:ea typeface="Helvetica Neue" pitchFamily="34" charset="-122"/>
+                <a:cs typeface="Helvetica Neue" pitchFamily="34" charset="-120"/>
+              </a:rPr>
+              <a:t>La alpaca en los Andes. Cada ruta nueva trae su propio animal local — y los colores y mapas cambian según el lugar.</a:t>
             </a:r>
             <a:endParaRPr lang="en-US" sz="1250" dirty="0"/>
           </a:p>
